--- a/static/teaching/Lecture06BIndustrialRevolution.pptx
+++ b/static/teaching/Lecture06BIndustrialRevolution.pptx
@@ -1779,7 +1779,7 @@
             <a:fld id="{58BF45B5-DCFD-4218-878C-8B93A6FFB68C}" type="datetimeFigureOut">
               <a:rPr lang="en-US" smtClean="0"/>
               <a:pPr/>
-              <a:t>10/26/2025</a:t>
+              <a:t>10/18/2026</a:t>
             </a:fld>
             <a:endParaRPr lang="en-US"/>
           </a:p>
@@ -1946,7 +1946,7 @@
             <a:fld id="{0D9F1753-3F7D-4DFD-9DFA-339E4420501F}" type="datetimeFigureOut">
               <a:rPr lang="en-US" smtClean="0"/>
               <a:pPr/>
-              <a:t>10/26/2025</a:t>
+              <a:t>10/18/2026</a:t>
             </a:fld>
             <a:endParaRPr lang="en-US"/>
           </a:p>
@@ -2864,7 +2864,7 @@
             <a:fld id="{C79B92E4-0C46-4DC2-9061-45E660889547}" type="datetime1">
               <a:rPr lang="en-US" smtClean="0"/>
               <a:pPr/>
-              <a:t>10/26/2025</a:t>
+              <a:t>10/18/2026</a:t>
             </a:fld>
             <a:endParaRPr lang="en-US"/>
           </a:p>
@@ -3029,7 +3029,7 @@
             <a:fld id="{CF6857D5-C0C2-4602-AA19-009F7D962D18}" type="datetime1">
               <a:rPr lang="en-US" smtClean="0"/>
               <a:pPr/>
-              <a:t>10/26/2025</a:t>
+              <a:t>10/18/2026</a:t>
             </a:fld>
             <a:endParaRPr lang="en-US"/>
           </a:p>
@@ -3204,7 +3204,7 @@
             <a:fld id="{E771E01D-F533-4580-AF32-50EBE61856DB}" type="datetime1">
               <a:rPr lang="en-US" smtClean="0"/>
               <a:pPr/>
-              <a:t>10/26/2025</a:t>
+              <a:t>10/18/2026</a:t>
             </a:fld>
             <a:endParaRPr lang="en-US"/>
           </a:p>
@@ -3369,7 +3369,7 @@
             <a:fld id="{41DED0D7-D3EC-4976-8239-8CEEBB7D6A62}" type="datetime1">
               <a:rPr lang="en-US" smtClean="0"/>
               <a:pPr/>
-              <a:t>10/26/2025</a:t>
+              <a:t>10/18/2026</a:t>
             </a:fld>
             <a:endParaRPr lang="en-US"/>
           </a:p>
@@ -3611,7 +3611,7 @@
             <a:fld id="{1E465926-BC1A-45B3-AEC4-CD64736DA1B1}" type="datetime1">
               <a:rPr lang="en-US" smtClean="0"/>
               <a:pPr/>
-              <a:t>10/26/2025</a:t>
+              <a:t>10/18/2026</a:t>
             </a:fld>
             <a:endParaRPr lang="en-US"/>
           </a:p>
@@ -3893,7 +3893,7 @@
             <a:fld id="{3999F9C9-E9F9-4839-946D-61F2BC174190}" type="datetime1">
               <a:rPr lang="en-US" smtClean="0"/>
               <a:pPr/>
-              <a:t>10/26/2025</a:t>
+              <a:t>10/18/2026</a:t>
             </a:fld>
             <a:endParaRPr lang="en-US"/>
           </a:p>
@@ -4309,7 +4309,7 @@
             <a:fld id="{113E41B5-66FC-4FDE-B4DB-E7844118AC67}" type="datetime1">
               <a:rPr lang="en-US" smtClean="0"/>
               <a:pPr/>
-              <a:t>10/26/2025</a:t>
+              <a:t>10/18/2026</a:t>
             </a:fld>
             <a:endParaRPr lang="en-US"/>
           </a:p>
@@ -4423,7 +4423,7 @@
             <a:fld id="{23607BE5-9B7D-4416-AAE5-13701F80FBD3}" type="datetime1">
               <a:rPr lang="en-US" smtClean="0"/>
               <a:pPr/>
-              <a:t>10/26/2025</a:t>
+              <a:t>10/18/2026</a:t>
             </a:fld>
             <a:endParaRPr lang="en-US"/>
           </a:p>
@@ -4515,7 +4515,7 @@
             <a:fld id="{5955E152-4A0A-4000-916E-DB45E06C9542}" type="datetime1">
               <a:rPr lang="en-US" smtClean="0"/>
               <a:pPr/>
-              <a:t>10/26/2025</a:t>
+              <a:t>10/18/2026</a:t>
             </a:fld>
             <a:endParaRPr lang="en-US"/>
           </a:p>
@@ -4787,7 +4787,7 @@
             <a:fld id="{1A30059F-ACE8-4063-BC3F-4E4838BD35FE}" type="datetime1">
               <a:rPr lang="en-US" smtClean="0"/>
               <a:pPr/>
-              <a:t>10/26/2025</a:t>
+              <a:t>10/18/2026</a:t>
             </a:fld>
             <a:endParaRPr lang="en-US"/>
           </a:p>
@@ -5036,7 +5036,7 @@
             <a:fld id="{2A052837-BB98-4FFD-A0DA-494FA99A3EE7}" type="datetime1">
               <a:rPr lang="en-US" smtClean="0"/>
               <a:pPr/>
-              <a:t>10/26/2025</a:t>
+              <a:t>10/18/2026</a:t>
             </a:fld>
             <a:endParaRPr lang="en-US"/>
           </a:p>
@@ -5244,7 +5244,7 @@
             <a:fld id="{89ED827B-DBC9-4FD6-A940-A62CF02B0B94}" type="datetime1">
               <a:rPr lang="en-US" smtClean="0"/>
               <a:pPr/>
-              <a:t>10/26/2025</a:t>
+              <a:t>10/18/2026</a:t>
             </a:fld>
             <a:endParaRPr lang="en-US"/>
           </a:p>
@@ -7075,7 +7075,7 @@
               <a:p>
                 <a:r>
                   <a:rPr lang="en-US" dirty="0"/>
-                  <a:t>Whether the ideas survive depends on the relative strength of:</a:t>
+                  <a:t>Whether ideas survive depends on the relative strength of:</a:t>
                 </a:r>
               </a:p>
               <a:p>
@@ -7095,7 +7095,7 @@
               <a:p>
                 <a:r>
                   <a:rPr lang="en-US" dirty="0"/>
-                  <a:t>At most times/places, the forces/technologies seeking to suppress new ideas had upper hand </a:t>
+                  <a:t>At most times/places, the forces/technologies seeking to suppress new ideas had the upper hand </a:t>
                 </a:r>
                 <a14:m>
                   <m:oMath xmlns:m="http://schemas.openxmlformats.org/officeDocument/2006/math">
@@ -7146,7 +7146,7 @@
               <a:blipFill>
                 <a:blip r:embed="rId2"/>
                 <a:stretch>
-                  <a:fillRect l="-1278" t="-1752" r="-500"/>
+                  <a:fillRect l="-1278" t="-1752"/>
                 </a:stretch>
               </a:blipFill>
             </p:spPr>
@@ -8511,7 +8511,7 @@
           <p:cNvPr id="9" name="Content Placeholder 8" descr="A map of the united states&#10;&#10;AI-generated content may be incorrect.">
             <a:extLst>
               <a:ext uri="{FF2B5EF4-FFF2-40B4-BE49-F238E27FC236}">
-                <a16:creationId xmlns:a16="http://schemas.microsoft.com/office/drawing/2014/main" id="{73C83D0E-872E-6124-8124-668884A7816F}"/>
+                <a16:creationId xmlns:a16="http://schemas.microsoft.com/office/drawing/2014/main" id="{084D23B3-49D8-F803-E0DE-1B01BE73E6D3}"/>
               </a:ext>
             </a:extLst>
           </p:cNvPr>
@@ -8536,8 +8536,8 @@
         </p:blipFill>
         <p:spPr>
           <a:xfrm>
-            <a:off x="5813040" y="1417638"/>
-            <a:ext cx="5955827" cy="5059362"/>
+            <a:off x="5813040" y="1381847"/>
+            <a:ext cx="5997960" cy="5095153"/>
           </a:xfrm>
         </p:spPr>
       </p:pic>
@@ -8688,6 +8688,51 @@
                                               <p:pRg st="5" end="5"/>
                                             </p:txEl>
                                           </p:spTgt>
+                                        </p:tgtEl>
+                                        <p:attrNameLst>
+                                          <p:attrName>style.visibility</p:attrName>
+                                        </p:attrNameLst>
+                                      </p:cBhvr>
+                                      <p:to>
+                                        <p:strVal val="visible"/>
+                                      </p:to>
+                                    </p:set>
+                                  </p:childTnLst>
+                                </p:cTn>
+                              </p:par>
+                            </p:childTnLst>
+                          </p:cTn>
+                        </p:par>
+                      </p:childTnLst>
+                    </p:cTn>
+                  </p:par>
+                  <p:par>
+                    <p:cTn id="15" fill="hold">
+                      <p:stCondLst>
+                        <p:cond delay="indefinite"/>
+                      </p:stCondLst>
+                      <p:childTnLst>
+                        <p:par>
+                          <p:cTn id="16" fill="hold">
+                            <p:stCondLst>
+                              <p:cond delay="0"/>
+                            </p:stCondLst>
+                            <p:childTnLst>
+                              <p:par>
+                                <p:cTn id="17" presetID="1" presetClass="entr" presetSubtype="0" fill="hold" nodeType="clickEffect">
+                                  <p:stCondLst>
+                                    <p:cond delay="0"/>
+                                  </p:stCondLst>
+                                  <p:childTnLst>
+                                    <p:set>
+                                      <p:cBhvr>
+                                        <p:cTn id="18" dur="1" fill="hold">
+                                          <p:stCondLst>
+                                            <p:cond delay="0"/>
+                                          </p:stCondLst>
+                                        </p:cTn>
+                                        <p:tgtEl>
+                                          <p:spTgt spid="9"/>
                                         </p:tgtEl>
                                         <p:attrNameLst>
                                           <p:attrName>style.visibility</p:attrName>
@@ -9621,10 +9666,7 @@
                 <a:pPr/>
                 <a14:m>
                   <m:oMathPara xmlns:m="http://schemas.openxmlformats.org/officeDocument/2006/math">
-                    <m:oMathParaPr>
-                      <m:jc m:val="centerGroup"/>
-                    </m:oMathParaPr>
-                    <m:oMath xmlns:m="http://schemas.openxmlformats.org/officeDocument/2006/math">
+                    <m:oMath>
                       <m:sSub>
                         <m:sSubPr>
                           <m:ctrlPr>
@@ -9680,7 +9722,7 @@
                       <m:sSub>
                         <m:sSubPr>
                           <m:ctrlPr>
-                            <a:rPr lang="en-US" sz="2800" i="1">
+                            <a:rPr lang="en-US" sz="2800" i="0">
                               <a:latin typeface="Cambria Math" panose="02040503050406030204" pitchFamily="18" charset="0"/>
                               <a:ea typeface="Cambria Math" panose="02040503050406030204" pitchFamily="18" charset="0"/>
                             </a:rPr>
@@ -9691,7 +9733,7 @@
                             <m:rPr>
                               <m:nor/>
                             </m:rPr>
-                            <a:rPr lang="en-US" sz="2800">
+                            <a:rPr lang="en-US" sz="2800" i="0">
                               <a:latin typeface="Cambria Math" panose="02040503050406030204" pitchFamily="18" charset="0"/>
                               <a:ea typeface="Cambria Math" panose="02040503050406030204" pitchFamily="18" charset="0"/>
                             </a:rPr>
@@ -9718,7 +9760,7 @@
                       <m:sSubSup>
                         <m:sSubSupPr>
                           <m:ctrlPr>
-                            <a:rPr lang="en-US" sz="2800" i="1">
+                            <a:rPr lang="en-US" sz="2800" b="1" i="1">
                               <a:latin typeface="Cambria Math" panose="02040503050406030204" pitchFamily="18" charset="0"/>
                               <a:ea typeface="Cambria Math" panose="02040503050406030204" pitchFamily="18" charset="0"/>
                             </a:rPr>
@@ -10120,14 +10162,11 @@
                 <a:pPr/>
                 <a14:m>
                   <m:oMathPara xmlns:m="http://schemas.openxmlformats.org/officeDocument/2006/math">
-                    <m:oMathParaPr>
-                      <m:jc m:val="centerGroup"/>
-                    </m:oMathParaPr>
-                    <m:oMath xmlns:m="http://schemas.openxmlformats.org/officeDocument/2006/math">
+                    <m:oMath>
                       <m:sSub>
                         <m:sSubPr>
                           <m:ctrlPr>
-                            <a:rPr lang="en-US" sz="2800" i="1">
+                            <a:rPr lang="en-US" sz="2800" i="0">
                               <a:latin typeface="Cambria Math" panose="02040503050406030204" pitchFamily="18" charset="0"/>
                             </a:rPr>
                           </m:ctrlPr>
@@ -10137,7 +10176,7 @@
                             <m:rPr>
                               <m:nor/>
                             </m:rPr>
-                            <a:rPr lang="en-US" sz="2800">
+                            <a:rPr lang="en-US" sz="2800" i="0">
                               <a:latin typeface="Cambria Math" panose="02040503050406030204" pitchFamily="18" charset="0"/>
                             </a:rPr>
                             <m:t>PROSP</m:t>
@@ -10182,7 +10221,7 @@
                       <m:sSub>
                         <m:sSubPr>
                           <m:ctrlPr>
-                            <a:rPr lang="en-US" sz="2800" i="1">
+                            <a:rPr lang="en-US" sz="2800" i="0">
                               <a:latin typeface="Cambria Math" panose="02040503050406030204" pitchFamily="18" charset="0"/>
                               <a:ea typeface="Cambria Math" panose="02040503050406030204" pitchFamily="18" charset="0"/>
                             </a:rPr>
@@ -10193,7 +10232,7 @@
                             <m:rPr>
                               <m:nor/>
                             </m:rPr>
-                            <a:rPr lang="en-US" sz="2800">
+                            <a:rPr lang="en-US" sz="2800" i="0">
                               <a:latin typeface="Cambria Math" panose="02040503050406030204" pitchFamily="18" charset="0"/>
                               <a:ea typeface="Cambria Math" panose="02040503050406030204" pitchFamily="18" charset="0"/>
                             </a:rPr>
@@ -10220,7 +10259,7 @@
                       <m:sSubSup>
                         <m:sSubSupPr>
                           <m:ctrlPr>
-                            <a:rPr lang="en-US" sz="2800" i="1">
+                            <a:rPr lang="en-US" sz="2800" b="1" i="1">
                               <a:latin typeface="Cambria Math" panose="02040503050406030204" pitchFamily="18" charset="0"/>
                               <a:ea typeface="Cambria Math" panose="02040503050406030204" pitchFamily="18" charset="0"/>
                             </a:rPr>
@@ -15336,6 +15375,50 @@
           </a:p>
         </p:txBody>
       </p:sp>
+      <p:sp>
+        <p:nvSpPr>
+          <p:cNvPr id="3" name="TextBox 2">
+            <a:extLst>
+              <a:ext uri="{FF2B5EF4-FFF2-40B4-BE49-F238E27FC236}">
+                <a16:creationId xmlns:a16="http://schemas.microsoft.com/office/drawing/2014/main" id="{CDC17808-6B69-4980-D3D1-C3FD0B1A2933}"/>
+              </a:ext>
+            </a:extLst>
+          </p:cNvPr>
+          <p:cNvSpPr txBox="1"/>
+          <p:nvPr/>
+        </p:nvSpPr>
+        <p:spPr>
+          <a:xfrm>
+            <a:off x="304800" y="6048086"/>
+            <a:ext cx="3326552" cy="307777"/>
+          </a:xfrm>
+          <a:prstGeom prst="rect">
+            <a:avLst/>
+          </a:prstGeom>
+          <a:noFill/>
+        </p:spPr>
+        <p:txBody>
+          <a:bodyPr wrap="none" rtlCol="0">
+            <a:spAutoFit/>
+          </a:bodyPr>
+          <a:lstStyle/>
+          <a:p>
+            <a:r>
+              <a:rPr lang="is-IS" sz="1400" dirty="0"/>
+              <a:t>Note</a:t>
+            </a:r>
+            <a:r>
+              <a:rPr lang="en-US" sz="1400" dirty="0"/>
+              <a:t>: </a:t>
+            </a:r>
+            <a:r>
+              <a:rPr lang="is-IS" sz="1400" dirty="0"/>
+              <a:t>Pounds of coal per horsepower-hour.</a:t>
+            </a:r>
+            <a:endParaRPr lang="en-US" sz="1400" dirty="0"/>
+          </a:p>
+        </p:txBody>
+      </p:sp>
     </p:spTree>
     <p:extLst>
       <p:ext uri="{BB962C8B-B14F-4D97-AF65-F5344CB8AC3E}">
@@ -17844,8 +17927,12 @@
           <a:p>
             <a:pPr lvl="2"/>
             <a:r>
-              <a:rPr lang="en-US" dirty="0"/>
-              <a:t>Cortez burned the boats he arrived on </a:t>
+              <a:rPr lang="en-US"/>
+              <a:t>Cortez sank </a:t>
+            </a:r>
+            <a:r>
+              <a:rPr lang="en-US" dirty="0"/>
+              <a:t>the boats he arrived on </a:t>
             </a:r>
             <a:br>
               <a:rPr lang="en-US" dirty="0"/>
